--- a/Materials/06-logreg-multiclass-hyperopt.pptx
+++ b/Materials/06-logreg-multiclass-hyperopt.pptx
@@ -5,7 +5,7 @@
     <p:sldMasterId id="2147483648" r:id="rId1"/>
   </p:sldMasterIdLst>
   <p:notesMasterIdLst>
-    <p:notesMasterId r:id="rId39"/>
+    <p:notesMasterId r:id="rId42"/>
   </p:notesMasterIdLst>
   <p:sldIdLst>
     <p:sldId id="277" r:id="rId2"/>
@@ -45,6 +45,9 @@
     <p:sldId id="327" r:id="rId36"/>
     <p:sldId id="328" r:id="rId37"/>
     <p:sldId id="329" r:id="rId38"/>
+    <p:sldId id="330" r:id="rId39"/>
+    <p:sldId id="331" r:id="rId40"/>
+    <p:sldId id="332" r:id="rId41"/>
   </p:sldIdLst>
   <p:sldSz cx="12192000" cy="6858000"/>
   <p:notesSz cx="6858000" cy="9144000"/>
@@ -6553,8 +6556,8 @@
         </p:nvSpPr>
         <p:spPr>
           <a:xfrm>
-            <a:off x="838200" y="5969655"/>
-            <a:ext cx="8343900" cy="523220"/>
+            <a:off x="838200" y="5905857"/>
+            <a:ext cx="8879958" cy="954107"/>
           </a:xfrm>
           <a:prstGeom prst="rect">
             <a:avLst/>
@@ -6569,7 +6572,7 @@
           <a:p>
             <a:r>
               <a:rPr lang="en-US" sz="2800" dirty="0"/>
-              <a:t>Isotonic Regression is usually applied for big dataset</a:t>
+              <a:t>Isotonic Regression is usually applied for big datasets and ML models like Random Forest, Gradient Boosting, etc.</a:t>
             </a:r>
             <a:endParaRPr lang="ru-RU" sz="2800" dirty="0"/>
           </a:p>
@@ -9474,7 +9477,7 @@
           <a:p>
             <a:r>
               <a:rPr lang="en-US" sz="2800" dirty="0"/>
-              <a:t>Main problem: number of constraints is proportional to N*K =&gt; constrained view is possible only for relatively small datasets</a:t>
+              <a:t>Main problem: number of constraints is proportional to N*K =&gt; primal/dual view is possible only for relatively small datasets</a:t>
             </a:r>
             <a:endParaRPr lang="ru-RU" sz="2800" dirty="0"/>
           </a:p>
@@ -11035,10 +11038,10 @@
       </p:pic>
       <p:pic>
         <p:nvPicPr>
-          <p:cNvPr id="22" name="Рисунок 21">
-            <a:extLst>
-              <a:ext uri="{FF2B5EF4-FFF2-40B4-BE49-F238E27FC236}">
-                <a16:creationId xmlns:a16="http://schemas.microsoft.com/office/drawing/2014/main" id="{CF83BDF9-8364-A4C9-B69F-168A0FCBD735}"/>
+          <p:cNvPr id="24" name="Рисунок 23">
+            <a:extLst>
+              <a:ext uri="{FF2B5EF4-FFF2-40B4-BE49-F238E27FC236}">
+                <a16:creationId xmlns:a16="http://schemas.microsoft.com/office/drawing/2014/main" id="{9ABE4C4D-4DBB-34C5-1073-9B70FE1D9F03}"/>
               </a:ext>
             </a:extLst>
           </p:cNvPr>
@@ -11061,8 +11064,8 @@
         </p:blipFill>
         <p:spPr>
           <a:xfrm>
-            <a:off x="969302" y="1502363"/>
-            <a:ext cx="5486844" cy="1043957"/>
+            <a:off x="3576766" y="2533095"/>
+            <a:ext cx="3545403" cy="531375"/>
           </a:xfrm>
           <a:prstGeom prst="rect">
             <a:avLst/>
@@ -11071,10 +11074,10 @@
       </p:pic>
       <p:pic>
         <p:nvPicPr>
-          <p:cNvPr id="24" name="Рисунок 23">
-            <a:extLst>
-              <a:ext uri="{FF2B5EF4-FFF2-40B4-BE49-F238E27FC236}">
-                <a16:creationId xmlns:a16="http://schemas.microsoft.com/office/drawing/2014/main" id="{9ABE4C4D-4DBB-34C5-1073-9B70FE1D9F03}"/>
+          <p:cNvPr id="4" name="Рисунок 3">
+            <a:extLst>
+              <a:ext uri="{FF2B5EF4-FFF2-40B4-BE49-F238E27FC236}">
+                <a16:creationId xmlns:a16="http://schemas.microsoft.com/office/drawing/2014/main" id="{3C51321C-9EA1-7F76-441B-1BCF634370AD}"/>
               </a:ext>
             </a:extLst>
           </p:cNvPr>
@@ -11097,8 +11100,8 @@
         </p:blipFill>
         <p:spPr>
           <a:xfrm>
-            <a:off x="3576766" y="2533095"/>
-            <a:ext cx="3545403" cy="531375"/>
+            <a:off x="951580" y="1470182"/>
+            <a:ext cx="5177940" cy="1026530"/>
           </a:xfrm>
           <a:prstGeom prst="rect">
             <a:avLst/>
@@ -12778,6 +12781,874 @@
 </p:sld>
 </file>
 
+<file path=ppt/slides/slide38.xml><?xml version="1.0" encoding="utf-8"?>
+<p:sld xmlns:a="http://schemas.openxmlformats.org/drawingml/2006/main" xmlns:r="http://schemas.openxmlformats.org/officeDocument/2006/relationships" xmlns:p="http://schemas.openxmlformats.org/presentationml/2006/main">
+  <p:cSld>
+    <p:spTree>
+      <p:nvGrpSpPr>
+        <p:cNvPr id="1" name=""/>
+        <p:cNvGrpSpPr/>
+        <p:nvPr/>
+      </p:nvGrpSpPr>
+      <p:grpSpPr>
+        <a:xfrm>
+          <a:off x="0" y="0"/>
+          <a:ext cx="0" cy="0"/>
+          <a:chOff x="0" y="0"/>
+          <a:chExt cx="0" cy="0"/>
+        </a:xfrm>
+      </p:grpSpPr>
+      <p:sp>
+        <p:nvSpPr>
+          <p:cNvPr id="2" name="Заголовок 1">
+            <a:extLst>
+              <a:ext uri="{FF2B5EF4-FFF2-40B4-BE49-F238E27FC236}">
+                <a16:creationId xmlns:a16="http://schemas.microsoft.com/office/drawing/2014/main" id="{8A4C465A-5A8C-FFA3-4EC3-1CB017ABBA24}"/>
+              </a:ext>
+            </a:extLst>
+          </p:cNvPr>
+          <p:cNvSpPr>
+            <a:spLocks noGrp="1"/>
+          </p:cNvSpPr>
+          <p:nvPr>
+            <p:ph type="title"/>
+          </p:nvPr>
+        </p:nvSpPr>
+        <p:spPr/>
+        <p:txBody>
+          <a:bodyPr/>
+          <a:lstStyle/>
+          <a:p>
+            <a:r>
+              <a:rPr lang="en-US" dirty="0" err="1"/>
+              <a:t>Optuna</a:t>
+            </a:r>
+            <a:r>
+              <a:rPr lang="en-US" dirty="0"/>
+              <a:t> optimization</a:t>
+            </a:r>
+            <a:endParaRPr lang="ru-RU" dirty="0"/>
+          </a:p>
+        </p:txBody>
+      </p:sp>
+      <p:sp>
+        <p:nvSpPr>
+          <p:cNvPr id="4" name="TextBox 3">
+            <a:extLst>
+              <a:ext uri="{FF2B5EF4-FFF2-40B4-BE49-F238E27FC236}">
+                <a16:creationId xmlns:a16="http://schemas.microsoft.com/office/drawing/2014/main" id="{D38BA384-2E2B-C5A0-F676-51E33D657951}"/>
+              </a:ext>
+            </a:extLst>
+          </p:cNvPr>
+          <p:cNvSpPr txBox="1"/>
+          <p:nvPr/>
+        </p:nvSpPr>
+        <p:spPr>
+          <a:xfrm>
+            <a:off x="838200" y="1690688"/>
+            <a:ext cx="6111801" cy="523220"/>
+          </a:xfrm>
+          <a:prstGeom prst="rect">
+            <a:avLst/>
+          </a:prstGeom>
+          <a:noFill/>
+        </p:spPr>
+        <p:txBody>
+          <a:bodyPr wrap="none" rtlCol="0">
+            <a:spAutoFit/>
+          </a:bodyPr>
+          <a:lstStyle/>
+          <a:p>
+            <a:r>
+              <a:rPr lang="en-US" sz="2800" dirty="0"/>
+              <a:t>Define a range for each hyperparameter:</a:t>
+            </a:r>
+            <a:endParaRPr lang="ru-RU" sz="2800" dirty="0"/>
+          </a:p>
+        </p:txBody>
+      </p:sp>
+      <p:pic>
+        <p:nvPicPr>
+          <p:cNvPr id="6" name="Рисунок 5">
+            <a:extLst>
+              <a:ext uri="{FF2B5EF4-FFF2-40B4-BE49-F238E27FC236}">
+                <a16:creationId xmlns:a16="http://schemas.microsoft.com/office/drawing/2014/main" id="{325DFE09-166C-6985-25DD-86491A9EB087}"/>
+              </a:ext>
+            </a:extLst>
+          </p:cNvPr>
+          <p:cNvPicPr>
+            <a:picLocks noChangeAspect="1"/>
+          </p:cNvPicPr>
+          <p:nvPr/>
+        </p:nvPicPr>
+        <p:blipFill>
+          <a:blip r:embed="rId2">
+            <a:extLst>
+              <a:ext uri="{28A0092B-C50C-407E-A947-70E740481C1C}">
+                <a14:useLocalDpi xmlns:a14="http://schemas.microsoft.com/office/drawing/2010/main" val="0"/>
+              </a:ext>
+            </a:extLst>
+          </a:blip>
+          <a:stretch>
+            <a:fillRect/>
+          </a:stretch>
+        </p:blipFill>
+        <p:spPr>
+          <a:xfrm>
+            <a:off x="6961696" y="1675393"/>
+            <a:ext cx="2138774" cy="523220"/>
+          </a:xfrm>
+          <a:prstGeom prst="rect">
+            <a:avLst/>
+          </a:prstGeom>
+        </p:spPr>
+      </p:pic>
+      <p:sp>
+        <p:nvSpPr>
+          <p:cNvPr id="7" name="TextBox 6">
+            <a:extLst>
+              <a:ext uri="{FF2B5EF4-FFF2-40B4-BE49-F238E27FC236}">
+                <a16:creationId xmlns:a16="http://schemas.microsoft.com/office/drawing/2014/main" id="{4C3A4601-A2A3-8419-AC30-764A9A85623E}"/>
+              </a:ext>
+            </a:extLst>
+          </p:cNvPr>
+          <p:cNvSpPr txBox="1"/>
+          <p:nvPr/>
+        </p:nvSpPr>
+        <p:spPr>
+          <a:xfrm>
+            <a:off x="838200" y="2960857"/>
+            <a:ext cx="8462125" cy="954107"/>
+          </a:xfrm>
+          <a:prstGeom prst="rect">
+            <a:avLst/>
+          </a:prstGeom>
+          <a:noFill/>
+        </p:spPr>
+        <p:txBody>
+          <a:bodyPr wrap="none" rtlCol="0">
+            <a:spAutoFit/>
+          </a:bodyPr>
+          <a:lstStyle/>
+          <a:p>
+            <a:r>
+              <a:rPr lang="en-US" sz="2800" dirty="0"/>
+              <a:t>Step 1. Sample randomly several sets of hyperparameters</a:t>
+            </a:r>
+          </a:p>
+          <a:p>
+            <a:r>
+              <a:rPr lang="en-US" sz="2800" dirty="0"/>
+              <a:t>and estimate CV quality of ML model for each set</a:t>
+            </a:r>
+            <a:endParaRPr lang="ru-RU" sz="2800" dirty="0"/>
+          </a:p>
+        </p:txBody>
+      </p:sp>
+      <p:pic>
+        <p:nvPicPr>
+          <p:cNvPr id="9" name="Рисунок 8">
+            <a:extLst>
+              <a:ext uri="{FF2B5EF4-FFF2-40B4-BE49-F238E27FC236}">
+                <a16:creationId xmlns:a16="http://schemas.microsoft.com/office/drawing/2014/main" id="{D573F181-EC75-562B-4B0F-42439A78E5AA}"/>
+              </a:ext>
+            </a:extLst>
+          </p:cNvPr>
+          <p:cNvPicPr>
+            <a:picLocks noChangeAspect="1"/>
+          </p:cNvPicPr>
+          <p:nvPr/>
+        </p:nvPicPr>
+        <p:blipFill>
+          <a:blip r:embed="rId3">
+            <a:extLst>
+              <a:ext uri="{28A0092B-C50C-407E-A947-70E740481C1C}">
+                <a14:useLocalDpi xmlns:a14="http://schemas.microsoft.com/office/drawing/2010/main" val="0"/>
+              </a:ext>
+            </a:extLst>
+          </a:blip>
+          <a:stretch>
+            <a:fillRect/>
+          </a:stretch>
+        </p:blipFill>
+        <p:spPr>
+          <a:xfrm>
+            <a:off x="9304404" y="3048563"/>
+            <a:ext cx="1514966" cy="417640"/>
+          </a:xfrm>
+          <a:prstGeom prst="rect">
+            <a:avLst/>
+          </a:prstGeom>
+        </p:spPr>
+      </p:pic>
+      <p:pic>
+        <p:nvPicPr>
+          <p:cNvPr id="11" name="Рисунок 10">
+            <a:extLst>
+              <a:ext uri="{FF2B5EF4-FFF2-40B4-BE49-F238E27FC236}">
+                <a16:creationId xmlns:a16="http://schemas.microsoft.com/office/drawing/2014/main" id="{E25D937E-15C7-6E86-EAF9-91F29E919554}"/>
+              </a:ext>
+            </a:extLst>
+          </p:cNvPr>
+          <p:cNvPicPr>
+            <a:picLocks noChangeAspect="1"/>
+          </p:cNvPicPr>
+          <p:nvPr/>
+        </p:nvPicPr>
+        <p:blipFill>
+          <a:blip r:embed="rId4">
+            <a:extLst>
+              <a:ext uri="{28A0092B-C50C-407E-A947-70E740481C1C}">
+                <a14:useLocalDpi xmlns:a14="http://schemas.microsoft.com/office/drawing/2010/main" val="0"/>
+              </a:ext>
+            </a:extLst>
+          </a:blip>
+          <a:stretch>
+            <a:fillRect/>
+          </a:stretch>
+        </p:blipFill>
+        <p:spPr>
+          <a:xfrm>
+            <a:off x="6961696" y="2198613"/>
+            <a:ext cx="2387812" cy="417640"/>
+          </a:xfrm>
+          <a:prstGeom prst="rect">
+            <a:avLst/>
+          </a:prstGeom>
+        </p:spPr>
+      </p:pic>
+      <p:pic>
+        <p:nvPicPr>
+          <p:cNvPr id="13" name="Рисунок 12">
+            <a:extLst>
+              <a:ext uri="{FF2B5EF4-FFF2-40B4-BE49-F238E27FC236}">
+                <a16:creationId xmlns:a16="http://schemas.microsoft.com/office/drawing/2014/main" id="{FDED2A45-4299-DACD-8B4F-D9869E4017AC}"/>
+              </a:ext>
+            </a:extLst>
+          </p:cNvPr>
+          <p:cNvPicPr>
+            <a:picLocks noChangeAspect="1"/>
+          </p:cNvPicPr>
+          <p:nvPr/>
+        </p:nvPicPr>
+        <p:blipFill>
+          <a:blip r:embed="rId5">
+            <a:extLst>
+              <a:ext uri="{28A0092B-C50C-407E-A947-70E740481C1C}">
+                <a14:useLocalDpi xmlns:a14="http://schemas.microsoft.com/office/drawing/2010/main" val="0"/>
+              </a:ext>
+            </a:extLst>
+          </a:blip>
+          <a:stretch>
+            <a:fillRect/>
+          </a:stretch>
+        </p:blipFill>
+        <p:spPr>
+          <a:xfrm>
+            <a:off x="8132710" y="3455717"/>
+            <a:ext cx="2269097" cy="465247"/>
+          </a:xfrm>
+          <a:prstGeom prst="rect">
+            <a:avLst/>
+          </a:prstGeom>
+        </p:spPr>
+      </p:pic>
+      <p:sp>
+        <p:nvSpPr>
+          <p:cNvPr id="14" name="TextBox 13">
+            <a:extLst>
+              <a:ext uri="{FF2B5EF4-FFF2-40B4-BE49-F238E27FC236}">
+                <a16:creationId xmlns:a16="http://schemas.microsoft.com/office/drawing/2014/main" id="{56C389DF-8F64-C829-B88B-92607929BD80}"/>
+              </a:ext>
+            </a:extLst>
+          </p:cNvPr>
+          <p:cNvSpPr txBox="1"/>
+          <p:nvPr/>
+        </p:nvSpPr>
+        <p:spPr>
+          <a:xfrm>
+            <a:off x="838201" y="4167038"/>
+            <a:ext cx="9510442" cy="1384995"/>
+          </a:xfrm>
+          <a:prstGeom prst="rect">
+            <a:avLst/>
+          </a:prstGeom>
+          <a:noFill/>
+        </p:spPr>
+        <p:txBody>
+          <a:bodyPr wrap="square" rtlCol="0">
+            <a:spAutoFit/>
+          </a:bodyPr>
+          <a:lstStyle/>
+          <a:p>
+            <a:r>
+              <a:rPr lang="en-US" sz="2800" dirty="0"/>
+              <a:t>Step 2. Divide all samples into two subsets: 1) high-quality samples with e.g. 25% best         values and 2) low-quality samples with the rest 75%          values </a:t>
+            </a:r>
+            <a:endParaRPr lang="ru-RU" sz="2800" dirty="0"/>
+          </a:p>
+        </p:txBody>
+      </p:sp>
+      <p:pic>
+        <p:nvPicPr>
+          <p:cNvPr id="16" name="Рисунок 15">
+            <a:extLst>
+              <a:ext uri="{FF2B5EF4-FFF2-40B4-BE49-F238E27FC236}">
+                <a16:creationId xmlns:a16="http://schemas.microsoft.com/office/drawing/2014/main" id="{C9D97871-62CD-6010-99DC-39BEB66DE2E6}"/>
+              </a:ext>
+            </a:extLst>
+          </p:cNvPr>
+          <p:cNvPicPr>
+            <a:picLocks noChangeAspect="1"/>
+          </p:cNvPicPr>
+          <p:nvPr/>
+        </p:nvPicPr>
+        <p:blipFill>
+          <a:blip r:embed="rId6">
+            <a:extLst>
+              <a:ext uri="{28A0092B-C50C-407E-A947-70E740481C1C}">
+                <a14:useLocalDpi xmlns:a14="http://schemas.microsoft.com/office/drawing/2010/main" val="0"/>
+              </a:ext>
+            </a:extLst>
+          </a:blip>
+          <a:stretch>
+            <a:fillRect/>
+          </a:stretch>
+        </p:blipFill>
+        <p:spPr>
+          <a:xfrm>
+            <a:off x="4883512" y="4631247"/>
+            <a:ext cx="645421" cy="489898"/>
+          </a:xfrm>
+          <a:prstGeom prst="rect">
+            <a:avLst/>
+          </a:prstGeom>
+        </p:spPr>
+      </p:pic>
+      <p:pic>
+        <p:nvPicPr>
+          <p:cNvPr id="17" name="Рисунок 16">
+            <a:extLst>
+              <a:ext uri="{FF2B5EF4-FFF2-40B4-BE49-F238E27FC236}">
+                <a16:creationId xmlns:a16="http://schemas.microsoft.com/office/drawing/2014/main" id="{879208AE-1584-587C-B2EE-F2EE4D0B1DE4}"/>
+              </a:ext>
+            </a:extLst>
+          </p:cNvPr>
+          <p:cNvPicPr>
+            <a:picLocks noChangeAspect="1"/>
+          </p:cNvPicPr>
+          <p:nvPr/>
+        </p:nvPicPr>
+        <p:blipFill>
+          <a:blip r:embed="rId6">
+            <a:extLst>
+              <a:ext uri="{28A0092B-C50C-407E-A947-70E740481C1C}">
+                <a14:useLocalDpi xmlns:a14="http://schemas.microsoft.com/office/drawing/2010/main" val="0"/>
+              </a:ext>
+            </a:extLst>
+          </a:blip>
+          <a:stretch>
+            <a:fillRect/>
+          </a:stretch>
+        </p:blipFill>
+        <p:spPr>
+          <a:xfrm>
+            <a:off x="4833884" y="5072768"/>
+            <a:ext cx="645421" cy="489898"/>
+          </a:xfrm>
+          <a:prstGeom prst="rect">
+            <a:avLst/>
+          </a:prstGeom>
+        </p:spPr>
+      </p:pic>
+      <p:sp>
+        <p:nvSpPr>
+          <p:cNvPr id="18" name="TextBox 17">
+            <a:extLst>
+              <a:ext uri="{FF2B5EF4-FFF2-40B4-BE49-F238E27FC236}">
+                <a16:creationId xmlns:a16="http://schemas.microsoft.com/office/drawing/2014/main" id="{8ACD4B77-73BC-D0C5-D887-7F8F26FA86CE}"/>
+              </a:ext>
+            </a:extLst>
+          </p:cNvPr>
+          <p:cNvSpPr txBox="1"/>
+          <p:nvPr/>
+        </p:nvSpPr>
+        <p:spPr>
+          <a:xfrm>
+            <a:off x="838200" y="5742577"/>
+            <a:ext cx="10857613" cy="954107"/>
+          </a:xfrm>
+          <a:prstGeom prst="rect">
+            <a:avLst/>
+          </a:prstGeom>
+          <a:noFill/>
+        </p:spPr>
+        <p:txBody>
+          <a:bodyPr wrap="square" rtlCol="0">
+            <a:spAutoFit/>
+          </a:bodyPr>
+          <a:lstStyle/>
+          <a:p>
+            <a:r>
+              <a:rPr lang="en-US" sz="2800" dirty="0"/>
+              <a:t>Step 3.</a:t>
+            </a:r>
+            <a:r>
+              <a:rPr lang="ru-RU" sz="2800" dirty="0"/>
+              <a:t> </a:t>
+            </a:r>
+            <a:r>
+              <a:rPr lang="en-US" sz="2800" dirty="0"/>
+              <a:t>Fits probability distribution                for high-quality samples and                  f	 for low-quality samples using Parzen Window estimator </a:t>
+            </a:r>
+            <a:endParaRPr lang="ru-RU" sz="2800" dirty="0"/>
+          </a:p>
+        </p:txBody>
+      </p:sp>
+      <p:pic>
+        <p:nvPicPr>
+          <p:cNvPr id="20" name="Рисунок 19">
+            <a:extLst>
+              <a:ext uri="{FF2B5EF4-FFF2-40B4-BE49-F238E27FC236}">
+                <a16:creationId xmlns:a16="http://schemas.microsoft.com/office/drawing/2014/main" id="{ED81224F-08E8-A7A3-AAAD-E576F2C84F3F}"/>
+              </a:ext>
+            </a:extLst>
+          </p:cNvPr>
+          <p:cNvPicPr>
+            <a:picLocks noChangeAspect="1"/>
+          </p:cNvPicPr>
+          <p:nvPr/>
+        </p:nvPicPr>
+        <p:blipFill>
+          <a:blip r:embed="rId7">
+            <a:extLst>
+              <a:ext uri="{28A0092B-C50C-407E-A947-70E740481C1C}">
+                <a14:useLocalDpi xmlns:a14="http://schemas.microsoft.com/office/drawing/2010/main" val="0"/>
+              </a:ext>
+            </a:extLst>
+          </a:blip>
+          <a:stretch>
+            <a:fillRect/>
+          </a:stretch>
+        </p:blipFill>
+        <p:spPr>
+          <a:xfrm>
+            <a:off x="6042834" y="5771845"/>
+            <a:ext cx="1091609" cy="469051"/>
+          </a:xfrm>
+          <a:prstGeom prst="rect">
+            <a:avLst/>
+          </a:prstGeom>
+        </p:spPr>
+      </p:pic>
+      <p:pic>
+        <p:nvPicPr>
+          <p:cNvPr id="22" name="Рисунок 21">
+            <a:extLst>
+              <a:ext uri="{FF2B5EF4-FFF2-40B4-BE49-F238E27FC236}">
+                <a16:creationId xmlns:a16="http://schemas.microsoft.com/office/drawing/2014/main" id="{7FB97BCA-32AD-E3CA-6E07-CAB46960AD83}"/>
+              </a:ext>
+            </a:extLst>
+          </p:cNvPr>
+          <p:cNvPicPr>
+            <a:picLocks noChangeAspect="1"/>
+          </p:cNvPicPr>
+          <p:nvPr/>
+        </p:nvPicPr>
+        <p:blipFill>
+          <a:blip r:embed="rId8">
+            <a:extLst>
+              <a:ext uri="{28A0092B-C50C-407E-A947-70E740481C1C}">
+                <a14:useLocalDpi xmlns:a14="http://schemas.microsoft.com/office/drawing/2010/main" val="0"/>
+              </a:ext>
+            </a:extLst>
+          </a:blip>
+          <a:stretch>
+            <a:fillRect/>
+          </a:stretch>
+        </p:blipFill>
+        <p:spPr>
+          <a:xfrm>
+            <a:off x="880732" y="6255164"/>
+            <a:ext cx="992464" cy="396985"/>
+          </a:xfrm>
+          <a:prstGeom prst="rect">
+            <a:avLst/>
+          </a:prstGeom>
+        </p:spPr>
+      </p:pic>
+    </p:spTree>
+    <p:extLst>
+      <p:ext uri="{BB962C8B-B14F-4D97-AF65-F5344CB8AC3E}">
+        <p14:creationId xmlns:p14="http://schemas.microsoft.com/office/powerpoint/2010/main" val="830847794"/>
+      </p:ext>
+    </p:extLst>
+  </p:cSld>
+  <p:clrMapOvr>
+    <a:masterClrMapping/>
+  </p:clrMapOvr>
+</p:sld>
+</file>
+
+<file path=ppt/slides/slide39.xml><?xml version="1.0" encoding="utf-8"?>
+<p:sld xmlns:a="http://schemas.openxmlformats.org/drawingml/2006/main" xmlns:r="http://schemas.openxmlformats.org/officeDocument/2006/relationships" xmlns:p="http://schemas.openxmlformats.org/presentationml/2006/main">
+  <p:cSld>
+    <p:spTree>
+      <p:nvGrpSpPr>
+        <p:cNvPr id="1" name=""/>
+        <p:cNvGrpSpPr/>
+        <p:nvPr/>
+      </p:nvGrpSpPr>
+      <p:grpSpPr>
+        <a:xfrm>
+          <a:off x="0" y="0"/>
+          <a:ext cx="0" cy="0"/>
+          <a:chOff x="0" y="0"/>
+          <a:chExt cx="0" cy="0"/>
+        </a:xfrm>
+      </p:grpSpPr>
+      <p:sp>
+        <p:nvSpPr>
+          <p:cNvPr id="2" name="Заголовок 1">
+            <a:extLst>
+              <a:ext uri="{FF2B5EF4-FFF2-40B4-BE49-F238E27FC236}">
+                <a16:creationId xmlns:a16="http://schemas.microsoft.com/office/drawing/2014/main" id="{33582A86-EEE0-6DD0-9F22-8BD2391E9F29}"/>
+              </a:ext>
+            </a:extLst>
+          </p:cNvPr>
+          <p:cNvSpPr>
+            <a:spLocks noGrp="1"/>
+          </p:cNvSpPr>
+          <p:nvPr>
+            <p:ph type="title"/>
+          </p:nvPr>
+        </p:nvSpPr>
+        <p:spPr/>
+        <p:txBody>
+          <a:bodyPr/>
+          <a:lstStyle/>
+          <a:p>
+            <a:r>
+              <a:rPr lang="en-US" dirty="0" err="1"/>
+              <a:t>Optuna</a:t>
+            </a:r>
+            <a:r>
+              <a:rPr lang="en-US" dirty="0"/>
+              <a:t> optimization</a:t>
+            </a:r>
+            <a:endParaRPr lang="ru-RU" dirty="0"/>
+          </a:p>
+        </p:txBody>
+      </p:sp>
+      <p:sp>
+        <p:nvSpPr>
+          <p:cNvPr id="4" name="TextBox 3">
+            <a:extLst>
+              <a:ext uri="{FF2B5EF4-FFF2-40B4-BE49-F238E27FC236}">
+                <a16:creationId xmlns:a16="http://schemas.microsoft.com/office/drawing/2014/main" id="{A2182694-211C-5421-0E77-5B7727AECC7B}"/>
+              </a:ext>
+            </a:extLst>
+          </p:cNvPr>
+          <p:cNvSpPr txBox="1"/>
+          <p:nvPr/>
+        </p:nvSpPr>
+        <p:spPr>
+          <a:xfrm>
+            <a:off x="838200" y="1615224"/>
+            <a:ext cx="9510442" cy="954107"/>
+          </a:xfrm>
+          <a:prstGeom prst="rect">
+            <a:avLst/>
+          </a:prstGeom>
+          <a:noFill/>
+        </p:spPr>
+        <p:txBody>
+          <a:bodyPr wrap="square" rtlCol="0">
+            <a:spAutoFit/>
+          </a:bodyPr>
+          <a:lstStyle/>
+          <a:p>
+            <a:r>
+              <a:rPr lang="en-US" sz="2800" dirty="0"/>
+              <a:t>Step </a:t>
+            </a:r>
+            <a:r>
+              <a:rPr lang="ru-RU" sz="2800" dirty="0"/>
+              <a:t>4</a:t>
+            </a:r>
+            <a:r>
+              <a:rPr lang="en-US" sz="2800" dirty="0"/>
+              <a:t>. Sample one new point      by maximizing                 and test ML model  </a:t>
+            </a:r>
+            <a:endParaRPr lang="ru-RU" sz="2800" dirty="0"/>
+          </a:p>
+        </p:txBody>
+      </p:sp>
+      <p:pic>
+        <p:nvPicPr>
+          <p:cNvPr id="6" name="Рисунок 5">
+            <a:extLst>
+              <a:ext uri="{FF2B5EF4-FFF2-40B4-BE49-F238E27FC236}">
+                <a16:creationId xmlns:a16="http://schemas.microsoft.com/office/drawing/2014/main" id="{9B2C06B0-55E0-CA2C-1713-8C6B34547495}"/>
+              </a:ext>
+            </a:extLst>
+          </p:cNvPr>
+          <p:cNvPicPr>
+            <a:picLocks noChangeAspect="1"/>
+          </p:cNvPicPr>
+          <p:nvPr/>
+        </p:nvPicPr>
+        <p:blipFill>
+          <a:blip r:embed="rId2">
+            <a:extLst>
+              <a:ext uri="{28A0092B-C50C-407E-A947-70E740481C1C}">
+                <a14:useLocalDpi xmlns:a14="http://schemas.microsoft.com/office/drawing/2010/main" val="0"/>
+              </a:ext>
+            </a:extLst>
+          </a:blip>
+          <a:stretch>
+            <a:fillRect/>
+          </a:stretch>
+        </p:blipFill>
+        <p:spPr>
+          <a:xfrm>
+            <a:off x="7937330" y="1445100"/>
+            <a:ext cx="1058753" cy="936590"/>
+          </a:xfrm>
+          <a:prstGeom prst="rect">
+            <a:avLst/>
+          </a:prstGeom>
+        </p:spPr>
+      </p:pic>
+      <p:pic>
+        <p:nvPicPr>
+          <p:cNvPr id="8" name="Рисунок 7">
+            <a:extLst>
+              <a:ext uri="{FF2B5EF4-FFF2-40B4-BE49-F238E27FC236}">
+                <a16:creationId xmlns:a16="http://schemas.microsoft.com/office/drawing/2014/main" id="{D17E9986-EA1C-B26E-4098-C88FD0A85749}"/>
+              </a:ext>
+            </a:extLst>
+          </p:cNvPr>
+          <p:cNvPicPr>
+            <a:picLocks noChangeAspect="1"/>
+          </p:cNvPicPr>
+          <p:nvPr/>
+        </p:nvPicPr>
+        <p:blipFill>
+          <a:blip r:embed="rId3">
+            <a:extLst>
+              <a:ext uri="{28A0092B-C50C-407E-A947-70E740481C1C}">
+                <a14:useLocalDpi xmlns:a14="http://schemas.microsoft.com/office/drawing/2010/main" val="0"/>
+              </a:ext>
+            </a:extLst>
+          </a:blip>
+          <a:stretch>
+            <a:fillRect/>
+          </a:stretch>
+        </p:blipFill>
+        <p:spPr>
+          <a:xfrm>
+            <a:off x="5330102" y="1690447"/>
+            <a:ext cx="321442" cy="373568"/>
+          </a:xfrm>
+          <a:prstGeom prst="rect">
+            <a:avLst/>
+          </a:prstGeom>
+        </p:spPr>
+      </p:pic>
+      <p:sp>
+        <p:nvSpPr>
+          <p:cNvPr id="9" name="TextBox 8">
+            <a:extLst>
+              <a:ext uri="{FF2B5EF4-FFF2-40B4-BE49-F238E27FC236}">
+                <a16:creationId xmlns:a16="http://schemas.microsoft.com/office/drawing/2014/main" id="{5D9B2E2B-7FFB-7924-8D6A-B5CF07E2922A}"/>
+              </a:ext>
+            </a:extLst>
+          </p:cNvPr>
+          <p:cNvSpPr txBox="1"/>
+          <p:nvPr/>
+        </p:nvSpPr>
+        <p:spPr>
+          <a:xfrm>
+            <a:off x="827566" y="2700255"/>
+            <a:ext cx="10526233" cy="954107"/>
+          </a:xfrm>
+          <a:prstGeom prst="rect">
+            <a:avLst/>
+          </a:prstGeom>
+          <a:noFill/>
+        </p:spPr>
+        <p:txBody>
+          <a:bodyPr wrap="square" rtlCol="0">
+            <a:spAutoFit/>
+          </a:bodyPr>
+          <a:lstStyle/>
+          <a:p>
+            <a:r>
+              <a:rPr lang="en-US" sz="2800" dirty="0"/>
+              <a:t>Step 5. Add the sampled point to high-quality or low-quality subset, update probability models               and             , go to step 4.</a:t>
+            </a:r>
+            <a:endParaRPr lang="ru-RU" sz="2800" dirty="0"/>
+          </a:p>
+        </p:txBody>
+      </p:sp>
+      <p:pic>
+        <p:nvPicPr>
+          <p:cNvPr id="10" name="Рисунок 9">
+            <a:extLst>
+              <a:ext uri="{FF2B5EF4-FFF2-40B4-BE49-F238E27FC236}">
+                <a16:creationId xmlns:a16="http://schemas.microsoft.com/office/drawing/2014/main" id="{7444CEDD-7AFB-1109-AAF7-F68F82E68AF9}"/>
+              </a:ext>
+            </a:extLst>
+          </p:cNvPr>
+          <p:cNvPicPr>
+            <a:picLocks noChangeAspect="1"/>
+          </p:cNvPicPr>
+          <p:nvPr/>
+        </p:nvPicPr>
+        <p:blipFill>
+          <a:blip r:embed="rId4">
+            <a:extLst>
+              <a:ext uri="{28A0092B-C50C-407E-A947-70E740481C1C}">
+                <a14:useLocalDpi xmlns:a14="http://schemas.microsoft.com/office/drawing/2010/main" val="0"/>
+              </a:ext>
+            </a:extLst>
+          </a:blip>
+          <a:stretch>
+            <a:fillRect/>
+          </a:stretch>
+        </p:blipFill>
+        <p:spPr>
+          <a:xfrm>
+            <a:off x="4784297" y="3158644"/>
+            <a:ext cx="1091609" cy="469051"/>
+          </a:xfrm>
+          <a:prstGeom prst="rect">
+            <a:avLst/>
+          </a:prstGeom>
+        </p:spPr>
+      </p:pic>
+      <p:pic>
+        <p:nvPicPr>
+          <p:cNvPr id="11" name="Рисунок 10">
+            <a:extLst>
+              <a:ext uri="{FF2B5EF4-FFF2-40B4-BE49-F238E27FC236}">
+                <a16:creationId xmlns:a16="http://schemas.microsoft.com/office/drawing/2014/main" id="{64D32DD2-B397-26D0-C779-9CAA6D6DC3F7}"/>
+              </a:ext>
+            </a:extLst>
+          </p:cNvPr>
+          <p:cNvPicPr>
+            <a:picLocks noChangeAspect="1"/>
+          </p:cNvPicPr>
+          <p:nvPr/>
+        </p:nvPicPr>
+        <p:blipFill>
+          <a:blip r:embed="rId5">
+            <a:extLst>
+              <a:ext uri="{28A0092B-C50C-407E-A947-70E740481C1C}">
+                <a14:useLocalDpi xmlns:a14="http://schemas.microsoft.com/office/drawing/2010/main" val="0"/>
+              </a:ext>
+            </a:extLst>
+          </a:blip>
+          <a:stretch>
+            <a:fillRect/>
+          </a:stretch>
+        </p:blipFill>
+        <p:spPr>
+          <a:xfrm>
+            <a:off x="6537248" y="3209444"/>
+            <a:ext cx="992464" cy="396985"/>
+          </a:xfrm>
+          <a:prstGeom prst="rect">
+            <a:avLst/>
+          </a:prstGeom>
+        </p:spPr>
+      </p:pic>
+      <p:sp>
+        <p:nvSpPr>
+          <p:cNvPr id="12" name="TextBox 11">
+            <a:extLst>
+              <a:ext uri="{FF2B5EF4-FFF2-40B4-BE49-F238E27FC236}">
+                <a16:creationId xmlns:a16="http://schemas.microsoft.com/office/drawing/2014/main" id="{949284FC-9688-09AF-9076-3728EC274B86}"/>
+              </a:ext>
+            </a:extLst>
+          </p:cNvPr>
+          <p:cNvSpPr txBox="1"/>
+          <p:nvPr/>
+        </p:nvSpPr>
+        <p:spPr>
+          <a:xfrm>
+            <a:off x="827566" y="3886975"/>
+            <a:ext cx="10526233" cy="1384995"/>
+          </a:xfrm>
+          <a:prstGeom prst="rect">
+            <a:avLst/>
+          </a:prstGeom>
+          <a:noFill/>
+        </p:spPr>
+        <p:txBody>
+          <a:bodyPr wrap="square" rtlCol="0">
+            <a:spAutoFit/>
+          </a:bodyPr>
+          <a:lstStyle/>
+          <a:p>
+            <a:r>
+              <a:rPr lang="en-US" sz="2800" dirty="0"/>
+              <a:t>Stop sampling by reaching 1) maximum number of iterations, 2) maximum allowed computational time or 3) when best set is not improving for the last several samples.</a:t>
+            </a:r>
+            <a:endParaRPr lang="ru-RU" sz="2800" dirty="0"/>
+          </a:p>
+        </p:txBody>
+      </p:sp>
+      <p:pic>
+        <p:nvPicPr>
+          <p:cNvPr id="13" name="Рисунок 12">
+            <a:extLst>
+              <a:ext uri="{FF2B5EF4-FFF2-40B4-BE49-F238E27FC236}">
+                <a16:creationId xmlns:a16="http://schemas.microsoft.com/office/drawing/2014/main" id="{EF0E1E43-2D18-3418-3C63-B3D16CCE0DD8}"/>
+              </a:ext>
+            </a:extLst>
+          </p:cNvPr>
+          <p:cNvPicPr>
+            <a:picLocks noChangeAspect="1"/>
+          </p:cNvPicPr>
+          <p:nvPr/>
+        </p:nvPicPr>
+        <p:blipFill>
+          <a:blip r:embed="rId6">
+            <a:extLst>
+              <a:ext uri="{28A0092B-C50C-407E-A947-70E740481C1C}">
+                <a14:useLocalDpi xmlns:a14="http://schemas.microsoft.com/office/drawing/2010/main" val="0"/>
+              </a:ext>
+            </a:extLst>
+          </a:blip>
+          <a:stretch>
+            <a:fillRect/>
+          </a:stretch>
+        </p:blipFill>
+        <p:spPr>
+          <a:xfrm>
+            <a:off x="3086613" y="2085281"/>
+            <a:ext cx="645421" cy="489898"/>
+          </a:xfrm>
+          <a:prstGeom prst="rect">
+            <a:avLst/>
+          </a:prstGeom>
+        </p:spPr>
+      </p:pic>
+    </p:spTree>
+    <p:extLst>
+      <p:ext uri="{BB962C8B-B14F-4D97-AF65-F5344CB8AC3E}">
+        <p14:creationId xmlns:p14="http://schemas.microsoft.com/office/powerpoint/2010/main" val="2780812939"/>
+      </p:ext>
+    </p:extLst>
+  </p:cSld>
+  <p:clrMapOvr>
+    <a:masterClrMapping/>
+  </p:clrMapOvr>
+</p:sld>
+</file>
+
 <file path=ppt/slides/slide4.xml><?xml version="1.0" encoding="utf-8"?>
 <p:sld xmlns:a="http://schemas.openxmlformats.org/drawingml/2006/main" xmlns:r="http://schemas.openxmlformats.org/officeDocument/2006/relationships" xmlns:p="http://schemas.openxmlformats.org/presentationml/2006/main">
   <p:cSld>
@@ -12972,6 +13843,249 @@
     <p:extLst>
       <p:ext uri="{BB962C8B-B14F-4D97-AF65-F5344CB8AC3E}">
         <p14:creationId xmlns:p14="http://schemas.microsoft.com/office/powerpoint/2010/main" val="117136602"/>
+      </p:ext>
+    </p:extLst>
+  </p:cSld>
+  <p:clrMapOvr>
+    <a:masterClrMapping/>
+  </p:clrMapOvr>
+</p:sld>
+</file>
+
+<file path=ppt/slides/slide40.xml><?xml version="1.0" encoding="utf-8"?>
+<p:sld xmlns:a="http://schemas.openxmlformats.org/drawingml/2006/main" xmlns:r="http://schemas.openxmlformats.org/officeDocument/2006/relationships" xmlns:p="http://schemas.openxmlformats.org/presentationml/2006/main">
+  <p:cSld>
+    <p:spTree>
+      <p:nvGrpSpPr>
+        <p:cNvPr id="1" name=""/>
+        <p:cNvGrpSpPr/>
+        <p:nvPr/>
+      </p:nvGrpSpPr>
+      <p:grpSpPr>
+        <a:xfrm>
+          <a:off x="0" y="0"/>
+          <a:ext cx="0" cy="0"/>
+          <a:chOff x="0" y="0"/>
+          <a:chExt cx="0" cy="0"/>
+        </a:xfrm>
+      </p:grpSpPr>
+      <p:sp>
+        <p:nvSpPr>
+          <p:cNvPr id="2" name="Заголовок 1">
+            <a:extLst>
+              <a:ext uri="{FF2B5EF4-FFF2-40B4-BE49-F238E27FC236}">
+                <a16:creationId xmlns:a16="http://schemas.microsoft.com/office/drawing/2014/main" id="{C6263755-615C-9F1D-B6EB-F1CB91EDEE17}"/>
+              </a:ext>
+            </a:extLst>
+          </p:cNvPr>
+          <p:cNvSpPr>
+            <a:spLocks noGrp="1"/>
+          </p:cNvSpPr>
+          <p:nvPr>
+            <p:ph type="title"/>
+          </p:nvPr>
+        </p:nvSpPr>
+        <p:spPr/>
+        <p:txBody>
+          <a:bodyPr/>
+          <a:lstStyle/>
+          <a:p>
+            <a:r>
+              <a:rPr lang="en-US" dirty="0" err="1"/>
+              <a:t>Optuna</a:t>
+            </a:r>
+            <a:r>
+              <a:rPr lang="en-US" dirty="0"/>
+              <a:t> optimization</a:t>
+            </a:r>
+            <a:endParaRPr lang="ru-RU" dirty="0"/>
+          </a:p>
+        </p:txBody>
+      </p:sp>
+      <p:pic>
+        <p:nvPicPr>
+          <p:cNvPr id="5" name="Рисунок 4">
+            <a:extLst>
+              <a:ext uri="{FF2B5EF4-FFF2-40B4-BE49-F238E27FC236}">
+                <a16:creationId xmlns:a16="http://schemas.microsoft.com/office/drawing/2014/main" id="{75DAC1A8-58E5-AEAE-4247-545082735A87}"/>
+              </a:ext>
+            </a:extLst>
+          </p:cNvPr>
+          <p:cNvPicPr>
+            <a:picLocks noChangeAspect="1"/>
+          </p:cNvPicPr>
+          <p:nvPr/>
+        </p:nvPicPr>
+        <p:blipFill>
+          <a:blip r:embed="rId2">
+            <a:extLst>
+              <a:ext uri="{28A0092B-C50C-407E-A947-70E740481C1C}">
+                <a14:useLocalDpi xmlns:a14="http://schemas.microsoft.com/office/drawing/2010/main" val="0"/>
+              </a:ext>
+            </a:extLst>
+          </a:blip>
+          <a:stretch>
+            <a:fillRect/>
+          </a:stretch>
+        </p:blipFill>
+        <p:spPr>
+          <a:xfrm>
+            <a:off x="2635262" y="3309458"/>
+            <a:ext cx="7061630" cy="3438604"/>
+          </a:xfrm>
+          <a:prstGeom prst="rect">
+            <a:avLst/>
+          </a:prstGeom>
+        </p:spPr>
+      </p:pic>
+      <p:pic>
+        <p:nvPicPr>
+          <p:cNvPr id="7" name="Рисунок 6">
+            <a:extLst>
+              <a:ext uri="{FF2B5EF4-FFF2-40B4-BE49-F238E27FC236}">
+                <a16:creationId xmlns:a16="http://schemas.microsoft.com/office/drawing/2014/main" id="{9C68BA44-0690-DE93-C941-9F15A99DC70C}"/>
+              </a:ext>
+            </a:extLst>
+          </p:cNvPr>
+          <p:cNvPicPr>
+            <a:picLocks noChangeAspect="1"/>
+          </p:cNvPicPr>
+          <p:nvPr/>
+        </p:nvPicPr>
+        <p:blipFill>
+          <a:blip r:embed="rId3">
+            <a:extLst>
+              <a:ext uri="{28A0092B-C50C-407E-A947-70E740481C1C}">
+                <a14:useLocalDpi xmlns:a14="http://schemas.microsoft.com/office/drawing/2010/main" val="0"/>
+              </a:ext>
+            </a:extLst>
+          </a:blip>
+          <a:stretch>
+            <a:fillRect/>
+          </a:stretch>
+        </p:blipFill>
+        <p:spPr>
+          <a:xfrm>
+            <a:off x="949836" y="1920718"/>
+            <a:ext cx="4424237" cy="1074000"/>
+          </a:xfrm>
+          <a:prstGeom prst="rect">
+            <a:avLst/>
+          </a:prstGeom>
+        </p:spPr>
+      </p:pic>
+      <p:pic>
+        <p:nvPicPr>
+          <p:cNvPr id="9" name="Рисунок 8">
+            <a:extLst>
+              <a:ext uri="{FF2B5EF4-FFF2-40B4-BE49-F238E27FC236}">
+                <a16:creationId xmlns:a16="http://schemas.microsoft.com/office/drawing/2014/main" id="{133C0355-46B1-690F-3783-7555366E9351}"/>
+              </a:ext>
+            </a:extLst>
+          </p:cNvPr>
+          <p:cNvPicPr>
+            <a:picLocks noChangeAspect="1"/>
+          </p:cNvPicPr>
+          <p:nvPr/>
+        </p:nvPicPr>
+        <p:blipFill>
+          <a:blip r:embed="rId4">
+            <a:extLst>
+              <a:ext uri="{28A0092B-C50C-407E-A947-70E740481C1C}">
+                <a14:useLocalDpi xmlns:a14="http://schemas.microsoft.com/office/drawing/2010/main" val="0"/>
+              </a:ext>
+            </a:extLst>
+          </a:blip>
+          <a:stretch>
+            <a:fillRect/>
+          </a:stretch>
+        </p:blipFill>
+        <p:spPr>
+          <a:xfrm>
+            <a:off x="6452194" y="2314931"/>
+            <a:ext cx="1325532" cy="386298"/>
+          </a:xfrm>
+          <a:prstGeom prst="rect">
+            <a:avLst/>
+          </a:prstGeom>
+        </p:spPr>
+      </p:pic>
+      <p:sp>
+        <p:nvSpPr>
+          <p:cNvPr id="10" name="TextBox 9">
+            <a:extLst>
+              <a:ext uri="{FF2B5EF4-FFF2-40B4-BE49-F238E27FC236}">
+                <a16:creationId xmlns:a16="http://schemas.microsoft.com/office/drawing/2014/main" id="{79DEF9DD-6F33-9BBB-0D55-515C38CBA3D4}"/>
+              </a:ext>
+            </a:extLst>
+          </p:cNvPr>
+          <p:cNvSpPr txBox="1"/>
+          <p:nvPr/>
+        </p:nvSpPr>
+        <p:spPr>
+          <a:xfrm>
+            <a:off x="838199" y="1486657"/>
+            <a:ext cx="9932582" cy="523220"/>
+          </a:xfrm>
+          <a:prstGeom prst="rect">
+            <a:avLst/>
+          </a:prstGeom>
+          <a:noFill/>
+        </p:spPr>
+        <p:txBody>
+          <a:bodyPr wrap="square" rtlCol="0">
+            <a:spAutoFit/>
+          </a:bodyPr>
+          <a:lstStyle/>
+          <a:p>
+            <a:r>
+              <a:rPr lang="en-US" sz="2800" dirty="0"/>
+              <a:t>Parzen Window Estimator for real-valued scalar parameter:</a:t>
+            </a:r>
+            <a:endParaRPr lang="ru-RU" sz="2800" dirty="0"/>
+          </a:p>
+        </p:txBody>
+      </p:sp>
+      <p:sp>
+        <p:nvSpPr>
+          <p:cNvPr id="11" name="TextBox 10">
+            <a:extLst>
+              <a:ext uri="{FF2B5EF4-FFF2-40B4-BE49-F238E27FC236}">
+                <a16:creationId xmlns:a16="http://schemas.microsoft.com/office/drawing/2014/main" id="{8F34C893-3411-21C3-E367-D2220471066C}"/>
+              </a:ext>
+            </a:extLst>
+          </p:cNvPr>
+          <p:cNvSpPr txBox="1"/>
+          <p:nvPr/>
+        </p:nvSpPr>
+        <p:spPr>
+          <a:xfrm>
+            <a:off x="7788359" y="2235837"/>
+            <a:ext cx="4160189" cy="523220"/>
+          </a:xfrm>
+          <a:prstGeom prst="rect">
+            <a:avLst/>
+          </a:prstGeom>
+          <a:noFill/>
+        </p:spPr>
+        <p:txBody>
+          <a:bodyPr wrap="square" rtlCol="0">
+            <a:spAutoFit/>
+          </a:bodyPr>
+          <a:lstStyle/>
+          <a:p>
+            <a:r>
+              <a:rPr lang="en-US" sz="2800" dirty="0"/>
+              <a:t>- previously sampled points</a:t>
+            </a:r>
+            <a:endParaRPr lang="ru-RU" sz="2800" dirty="0"/>
+          </a:p>
+        </p:txBody>
+      </p:sp>
+    </p:spTree>
+    <p:extLst>
+      <p:ext uri="{BB962C8B-B14F-4D97-AF65-F5344CB8AC3E}">
+        <p14:creationId xmlns:p14="http://schemas.microsoft.com/office/powerpoint/2010/main" val="2031977931"/>
       </p:ext>
     </p:extLst>
   </p:cSld>
